--- a/flutter_仕様書.pptx
+++ b/flutter_仕様書.pptx
@@ -6,8 +6,8 @@
   </p:sldMasterIdLst>
   <p:sldIdLst>
     <p:sldId id="256" r:id="rId2"/>
-    <p:sldId id="258" r:id="rId3"/>
-    <p:sldId id="257" r:id="rId4"/>
+    <p:sldId id="257" r:id="rId3"/>
+    <p:sldId id="258" r:id="rId4"/>
   </p:sldIdLst>
   <p:sldSz cx="12192000" cy="6858000"/>
   <p:notesSz cx="6858000" cy="9144000"/>
@@ -261,7 +261,7 @@
           <a:p>
             <a:fld id="{C36E91FD-3B1C-4228-B9F7-36E12070ADBD}" type="datetimeFigureOut">
               <a:rPr kumimoji="1" lang="ja-JP" altLang="en-US" smtClean="0"/>
-              <a:t>2026/1/14</a:t>
+              <a:t>2026/5/13</a:t>
             </a:fld>
             <a:endParaRPr kumimoji="1" lang="ja-JP" altLang="en-US"/>
           </a:p>
@@ -491,7 +491,7 @@
           <a:p>
             <a:fld id="{C36E91FD-3B1C-4228-B9F7-36E12070ADBD}" type="datetimeFigureOut">
               <a:rPr kumimoji="1" lang="ja-JP" altLang="en-US" smtClean="0"/>
-              <a:t>2026/1/14</a:t>
+              <a:t>2026/5/13</a:t>
             </a:fld>
             <a:endParaRPr kumimoji="1" lang="ja-JP" altLang="en-US"/>
           </a:p>
@@ -731,7 +731,7 @@
           <a:p>
             <a:fld id="{C36E91FD-3B1C-4228-B9F7-36E12070ADBD}" type="datetimeFigureOut">
               <a:rPr kumimoji="1" lang="ja-JP" altLang="en-US" smtClean="0"/>
-              <a:t>2026/1/14</a:t>
+              <a:t>2026/5/13</a:t>
             </a:fld>
             <a:endParaRPr kumimoji="1" lang="ja-JP" altLang="en-US"/>
           </a:p>
@@ -961,7 +961,7 @@
           <a:p>
             <a:fld id="{C36E91FD-3B1C-4228-B9F7-36E12070ADBD}" type="datetimeFigureOut">
               <a:rPr kumimoji="1" lang="ja-JP" altLang="en-US" smtClean="0"/>
-              <a:t>2026/1/14</a:t>
+              <a:t>2026/5/13</a:t>
             </a:fld>
             <a:endParaRPr kumimoji="1" lang="ja-JP" altLang="en-US"/>
           </a:p>
@@ -1236,7 +1236,7 @@
           <a:p>
             <a:fld id="{C36E91FD-3B1C-4228-B9F7-36E12070ADBD}" type="datetimeFigureOut">
               <a:rPr kumimoji="1" lang="ja-JP" altLang="en-US" smtClean="0"/>
-              <a:t>2026/1/14</a:t>
+              <a:t>2026/5/13</a:t>
             </a:fld>
             <a:endParaRPr kumimoji="1" lang="ja-JP" altLang="en-US"/>
           </a:p>
@@ -1565,7 +1565,7 @@
           <a:p>
             <a:fld id="{C36E91FD-3B1C-4228-B9F7-36E12070ADBD}" type="datetimeFigureOut">
               <a:rPr kumimoji="1" lang="ja-JP" altLang="en-US" smtClean="0"/>
-              <a:t>2026/1/14</a:t>
+              <a:t>2026/5/13</a:t>
             </a:fld>
             <a:endParaRPr kumimoji="1" lang="ja-JP" altLang="en-US"/>
           </a:p>
@@ -2041,7 +2041,7 @@
           <a:p>
             <a:fld id="{C36E91FD-3B1C-4228-B9F7-36E12070ADBD}" type="datetimeFigureOut">
               <a:rPr kumimoji="1" lang="ja-JP" altLang="en-US" smtClean="0"/>
-              <a:t>2026/1/14</a:t>
+              <a:t>2026/5/13</a:t>
             </a:fld>
             <a:endParaRPr kumimoji="1" lang="ja-JP" altLang="en-US"/>
           </a:p>
@@ -2182,7 +2182,7 @@
           <a:p>
             <a:fld id="{C36E91FD-3B1C-4228-B9F7-36E12070ADBD}" type="datetimeFigureOut">
               <a:rPr kumimoji="1" lang="ja-JP" altLang="en-US" smtClean="0"/>
-              <a:t>2026/1/14</a:t>
+              <a:t>2026/5/13</a:t>
             </a:fld>
             <a:endParaRPr kumimoji="1" lang="ja-JP" altLang="en-US"/>
           </a:p>
@@ -2295,7 +2295,7 @@
           <a:p>
             <a:fld id="{C36E91FD-3B1C-4228-B9F7-36E12070ADBD}" type="datetimeFigureOut">
               <a:rPr kumimoji="1" lang="ja-JP" altLang="en-US" smtClean="0"/>
-              <a:t>2026/1/14</a:t>
+              <a:t>2026/5/13</a:t>
             </a:fld>
             <a:endParaRPr kumimoji="1" lang="ja-JP" altLang="en-US"/>
           </a:p>
@@ -2638,7 +2638,7 @@
           <a:p>
             <a:fld id="{C36E91FD-3B1C-4228-B9F7-36E12070ADBD}" type="datetimeFigureOut">
               <a:rPr kumimoji="1" lang="ja-JP" altLang="en-US" smtClean="0"/>
-              <a:t>2026/1/14</a:t>
+              <a:t>2026/5/13</a:t>
             </a:fld>
             <a:endParaRPr kumimoji="1" lang="ja-JP" altLang="en-US"/>
           </a:p>
@@ -2926,7 +2926,7 @@
           <a:p>
             <a:fld id="{C36E91FD-3B1C-4228-B9F7-36E12070ADBD}" type="datetimeFigureOut">
               <a:rPr kumimoji="1" lang="ja-JP" altLang="en-US" smtClean="0"/>
-              <a:t>2026/1/14</a:t>
+              <a:t>2026/5/13</a:t>
             </a:fld>
             <a:endParaRPr kumimoji="1" lang="ja-JP" altLang="en-US"/>
           </a:p>
@@ -3199,7 +3199,7 @@
           <a:p>
             <a:fld id="{C36E91FD-3B1C-4228-B9F7-36E12070ADBD}" type="datetimeFigureOut">
               <a:rPr kumimoji="1" lang="ja-JP" altLang="en-US" smtClean="0"/>
-              <a:t>2026/1/14</a:t>
+              <a:t>2026/5/13</a:t>
             </a:fld>
             <a:endParaRPr kumimoji="1" lang="ja-JP" altLang="en-US"/>
           </a:p>
@@ -3691,13 +3691,7 @@
   <p:cSld>
     <p:spTree>
       <p:nvGrpSpPr>
-        <p:cNvPr id="1" name="">
-          <a:extLst>
-            <a:ext uri="{FF2B5EF4-FFF2-40B4-BE49-F238E27FC236}">
-              <a16:creationId xmlns:a16="http://schemas.microsoft.com/office/drawing/2014/main" id="{FE4039B3-8423-A979-3A2B-A10F2F4186D6}"/>
-            </a:ext>
-          </a:extLst>
-        </p:cNvPr>
+        <p:cNvPr id="1" name=""/>
         <p:cNvGrpSpPr/>
         <p:nvPr/>
       </p:nvGrpSpPr>
@@ -3714,59 +3708,84 @@
           <p:cNvPr id="2" name="タイトル 1">
             <a:extLst>
               <a:ext uri="{FF2B5EF4-FFF2-40B4-BE49-F238E27FC236}">
-                <a16:creationId xmlns:a16="http://schemas.microsoft.com/office/drawing/2014/main" id="{7E8369ED-B0A6-E50D-9CAF-E262B8DDBA37}"/>
-              </a:ext>
-            </a:extLst>
-          </p:cNvPr>
-          <p:cNvSpPr>
-            <a:spLocks noGrp="1"/>
-          </p:cNvSpPr>
-          <p:nvPr>
-            <p:ph type="ctrTitle"/>
-          </p:nvPr>
-        </p:nvSpPr>
-        <p:spPr/>
-        <p:txBody>
-          <a:bodyPr/>
-          <a:lstStyle/>
-          <a:p>
-            <a:r>
-              <a:rPr lang="ja-JP" altLang="en-US" b="1" dirty="0"/>
-              <a:t>クイズ</a:t>
-            </a:r>
-            <a:endParaRPr kumimoji="1" lang="ja-JP" altLang="en-US" dirty="0"/>
-          </a:p>
-        </p:txBody>
-      </p:sp>
-      <p:sp>
-        <p:nvSpPr>
-          <p:cNvPr id="3" name="字幕 2">
-            <a:extLst>
-              <a:ext uri="{FF2B5EF4-FFF2-40B4-BE49-F238E27FC236}">
-                <a16:creationId xmlns:a16="http://schemas.microsoft.com/office/drawing/2014/main" id="{4A570284-3702-F4C2-62D6-86FACB7BA9FA}"/>
-              </a:ext>
-            </a:extLst>
-          </p:cNvPr>
-          <p:cNvSpPr>
-            <a:spLocks noGrp="1"/>
-          </p:cNvSpPr>
-          <p:nvPr>
-            <p:ph type="subTitle" idx="1"/>
-          </p:nvPr>
-        </p:nvSpPr>
-        <p:spPr/>
-        <p:txBody>
-          <a:bodyPr/>
-          <a:lstStyle/>
-          <a:p>
-            <a:endParaRPr kumimoji="1" lang="ja-JP" altLang="en-US" dirty="0"/>
+                <a16:creationId xmlns:a16="http://schemas.microsoft.com/office/drawing/2014/main" id="{5D43CDEC-B2F4-B368-D899-C22DB74D9174}"/>
+              </a:ext>
+            </a:extLst>
+          </p:cNvPr>
+          <p:cNvSpPr>
+            <a:spLocks noGrp="1"/>
+          </p:cNvSpPr>
+          <p:nvPr>
+            <p:ph type="title"/>
+          </p:nvPr>
+        </p:nvSpPr>
+        <p:spPr/>
+        <p:txBody>
+          <a:bodyPr/>
+          <a:lstStyle/>
+          <a:p>
+            <a:r>
+              <a:rPr kumimoji="1" lang="ja-JP" altLang="en-US" dirty="0"/>
+              <a:t>三年次</a:t>
+            </a:r>
+          </a:p>
+        </p:txBody>
+      </p:sp>
+      <p:sp>
+        <p:nvSpPr>
+          <p:cNvPr id="3" name="コンテンツ プレースホルダー 2">
+            <a:extLst>
+              <a:ext uri="{FF2B5EF4-FFF2-40B4-BE49-F238E27FC236}">
+                <a16:creationId xmlns:a16="http://schemas.microsoft.com/office/drawing/2014/main" id="{DB06D1B6-48E9-B5BF-57E4-4B8FAB57210F}"/>
+              </a:ext>
+            </a:extLst>
+          </p:cNvPr>
+          <p:cNvSpPr>
+            <a:spLocks noGrp="1"/>
+          </p:cNvSpPr>
+          <p:nvPr>
+            <p:ph idx="1"/>
+          </p:nvPr>
+        </p:nvSpPr>
+        <p:spPr/>
+        <p:txBody>
+          <a:bodyPr/>
+          <a:lstStyle/>
+          <a:p>
+            <a:r>
+              <a:rPr kumimoji="1" lang="en-US" altLang="ja-JP" dirty="0" err="1"/>
+              <a:t>Quiz</a:t>
+            </a:r>
+            <a:r>
+              <a:rPr lang="en-US" altLang="ja-JP" dirty="0" err="1"/>
+              <a:t>knock</a:t>
+            </a:r>
+            <a:r>
+              <a:rPr lang="ja-JP" altLang="en-US" dirty="0"/>
+              <a:t>が好きだからという理由でクイズノックのアプリを作ろうと考えた</a:t>
+            </a:r>
+            <a:endParaRPr lang="en-US" altLang="ja-JP" dirty="0"/>
+          </a:p>
+          <a:p>
+            <a:r>
+              <a:rPr kumimoji="1" lang="ja-JP" altLang="en-US" dirty="0"/>
+              <a:t>内容は厳密には決まっていなかったので今日何を作るかを考える</a:t>
+            </a:r>
+            <a:endParaRPr kumimoji="1" lang="en-US" altLang="ja-JP" dirty="0"/>
+          </a:p>
+          <a:p>
+            <a:r>
+              <a:rPr lang="ja-JP" altLang="en-US" dirty="0"/>
+              <a:t>クイズノックが動画内でやっている変わったルールのクイズを作る</a:t>
+            </a:r>
+            <a:endParaRPr kumimoji="1" lang="en-US" altLang="ja-JP" dirty="0"/>
           </a:p>
         </p:txBody>
       </p:sp>
     </p:spTree>
     <p:extLst>
       <p:ext uri="{BB962C8B-B14F-4D97-AF65-F5344CB8AC3E}">
-        <p14:creationId xmlns:p14="http://schemas.microsoft.com/office/powerpoint/2010/main" val="123116863"/>
+        <p14:creationId xmlns:p14="http://schemas.microsoft.com/office/powerpoint/2010/main" val="963179746"/>
       </p:ext>
     </p:extLst>
   </p:cSld>
@@ -3798,7 +3817,7 @@
           <p:cNvPr id="2" name="タイトル 1">
             <a:extLst>
               <a:ext uri="{FF2B5EF4-FFF2-40B4-BE49-F238E27FC236}">
-                <a16:creationId xmlns:a16="http://schemas.microsoft.com/office/drawing/2014/main" id="{A16968D4-7DC9-6903-B38A-9B6648ABE37F}"/>
+                <a16:creationId xmlns:a16="http://schemas.microsoft.com/office/drawing/2014/main" id="{750D1F20-F4D0-DC43-1BD8-9A7FB98EA5A7}"/>
               </a:ext>
             </a:extLst>
           </p:cNvPr>
@@ -3815,162 +3834,136 @@
           <a:lstStyle/>
           <a:p>
             <a:r>
+              <a:rPr kumimoji="1" lang="ja-JP" altLang="en-US" dirty="0"/>
+              <a:t>実装内容</a:t>
+            </a:r>
+          </a:p>
+        </p:txBody>
+      </p:sp>
+      <p:sp>
+        <p:nvSpPr>
+          <p:cNvPr id="3" name="コンテンツ プレースホルダー 2">
+            <a:extLst>
+              <a:ext uri="{FF2B5EF4-FFF2-40B4-BE49-F238E27FC236}">
+                <a16:creationId xmlns:a16="http://schemas.microsoft.com/office/drawing/2014/main" id="{8E86481D-F549-0217-3BFD-4EBB22A319CC}"/>
+              </a:ext>
+            </a:extLst>
+          </p:cNvPr>
+          <p:cNvSpPr>
+            <a:spLocks noGrp="1"/>
+          </p:cNvSpPr>
+          <p:nvPr>
+            <p:ph idx="1"/>
+          </p:nvPr>
+        </p:nvSpPr>
+        <p:spPr>
+          <a:xfrm>
+            <a:off x="838200" y="1825624"/>
+            <a:ext cx="10515600" cy="4667251"/>
+          </a:xfrm>
+        </p:spPr>
+        <p:txBody>
+          <a:bodyPr>
+            <a:normAutofit/>
+          </a:bodyPr>
+          <a:lstStyle/>
+          <a:p>
+            <a:r>
+              <a:rPr lang="en-US" altLang="ja-JP" dirty="0">
+                <a:hlinkClick r:id="rId2"/>
+              </a:rPr>
+              <a:t>https://www.youtube.com/watch?v=V0psCs57bHQ</a:t>
+            </a:r>
+            <a:endParaRPr lang="en-US" altLang="ja-JP" dirty="0"/>
+          </a:p>
+          <a:p>
+            <a:pPr marL="0" indent="0">
+              <a:buNone/>
+            </a:pPr>
+            <a:r>
               <a:rPr lang="ja-JP" altLang="en-US" dirty="0"/>
-              <a:t>画面構成</a:t>
-            </a:r>
-            <a:endParaRPr kumimoji="1" lang="ja-JP" altLang="en-US" dirty="0"/>
-          </a:p>
-        </p:txBody>
-      </p:sp>
-      <p:sp>
-        <p:nvSpPr>
-          <p:cNvPr id="4" name="Rectangle 1">
-            <a:extLst>
-              <a:ext uri="{FF2B5EF4-FFF2-40B4-BE49-F238E27FC236}">
-                <a16:creationId xmlns:a16="http://schemas.microsoft.com/office/drawing/2014/main" id="{952F7AFA-D028-04B0-C808-EB014EA05A40}"/>
-              </a:ext>
-            </a:extLst>
-          </p:cNvPr>
-          <p:cNvSpPr>
-            <a:spLocks noGrp="1" noChangeArrowheads="1"/>
-          </p:cNvSpPr>
-          <p:nvPr>
-            <p:ph idx="1"/>
-          </p:nvPr>
-        </p:nvSpPr>
-        <p:spPr bwMode="auto">
-          <a:xfrm>
-            <a:off x="925286" y="2798243"/>
-            <a:ext cx="10515600" cy="1077218"/>
-          </a:xfrm>
-          <a:prstGeom prst="rect">
-            <a:avLst/>
-          </a:prstGeom>
-          <a:noFill/>
-          <a:ln>
-            <a:noFill/>
-          </a:ln>
-          <a:effectLst/>
-          <a:extLst>
-            <a:ext uri="{909E8E84-426E-40DD-AFC4-6F175D3DCCD1}">
-              <a14:hiddenFill xmlns:a14="http://schemas.microsoft.com/office/drawing/2010/main">
-                <a:solidFill>
-                  <a:schemeClr val="accent1"/>
-                </a:solidFill>
-              </a14:hiddenFill>
-            </a:ext>
-            <a:ext uri="{91240B29-F687-4F45-9708-019B960494DF}">
-              <a14:hiddenLine xmlns:a14="http://schemas.microsoft.com/office/drawing/2010/main" w="9525">
-                <a:solidFill>
-                  <a:schemeClr val="tx1"/>
-                </a:solidFill>
-                <a:miter lim="800000"/>
-                <a:headEnd/>
-                <a:tailEnd/>
-              </a14:hiddenLine>
-            </a:ext>
-            <a:ext uri="{AF507438-7753-43E0-B8FC-AC1667EBCBE1}">
-              <a14:hiddenEffects xmlns:a14="http://schemas.microsoft.com/office/drawing/2010/main">
-                <a:effectLst>
-                  <a:outerShdw dist="35921" dir="2700000" algn="ctr" rotWithShape="0">
-                    <a:schemeClr val="bg2"/>
-                  </a:outerShdw>
-                </a:effectLst>
-              </a14:hiddenEffects>
-            </a:ext>
-          </a:extLst>
-        </p:spPr>
-        <p:txBody>
-          <a:bodyPr vert="horz" wrap="square" lIns="91440" tIns="45720" rIns="91440" bIns="45720" numCol="1" anchor="ctr" anchorCtr="0" compatLnSpc="1">
-            <a:prstTxWarp prst="textNoShape">
-              <a:avLst/>
-            </a:prstTxWarp>
-            <a:spAutoFit/>
-          </a:bodyPr>
-          <a:lstStyle/>
-          <a:p>
-            <a:pPr marL="0" lvl="0" indent="0" eaLnBrk="0" fontAlgn="base" hangingPunct="0">
-              <a:lnSpc>
-                <a:spcPct val="100000"/>
-              </a:lnSpc>
-              <a:spcBef>
-                <a:spcPct val="0"/>
-              </a:spcBef>
-              <a:spcAft>
-                <a:spcPct val="0"/>
-              </a:spcAft>
-              <a:buFontTx/>
-              <a:buChar char="•"/>
+              <a:t>　↳ウソ</a:t>
+            </a:r>
+            <a:r>
+              <a:rPr lang="en-US" altLang="ja-JP" dirty="0"/>
+              <a:t>8OO</a:t>
+            </a:r>
+            <a:r>
+              <a:rPr lang="ja-JP" altLang="en-US" dirty="0"/>
+              <a:t>クイズ</a:t>
+            </a:r>
+            <a:endParaRPr lang="en-US" altLang="ja-JP" dirty="0"/>
+          </a:p>
+          <a:p>
+            <a:r>
+              <a:rPr lang="en-US" altLang="ja-JP" dirty="0">
+                <a:hlinkClick r:id="rId3"/>
+              </a:rPr>
+              <a:t>https://www.youtube.com/watch?v=wSbGiCSOCRY&amp;t=141s</a:t>
+            </a:r>
+            <a:endParaRPr lang="en-US" altLang="ja-JP" dirty="0"/>
+          </a:p>
+          <a:p>
+            <a:pPr marL="0" indent="0">
+              <a:buNone/>
             </a:pPr>
             <a:r>
-              <a:rPr lang="ja-JP" altLang="en-US" sz="3200" dirty="0"/>
-              <a:t>画面</a:t>
-            </a:r>
-            <a:r>
-              <a:rPr lang="en-US" altLang="ja-JP" sz="3200" dirty="0"/>
-              <a:t>1</a:t>
-            </a:r>
-            <a:r>
-              <a:rPr lang="ja-JP" altLang="en-US" sz="3200" dirty="0"/>
-              <a:t>：問題画面（</a:t>
-            </a:r>
-            <a:r>
-              <a:rPr lang="en-US" altLang="ja-JP" sz="3200" dirty="0"/>
-              <a:t>Question Page</a:t>
-            </a:r>
-            <a:r>
-              <a:rPr lang="ja-JP" altLang="en-US" sz="3200" dirty="0"/>
-              <a:t>）</a:t>
-            </a:r>
-            <a:endParaRPr lang="en-US" altLang="ja-JP" sz="3200" dirty="0"/>
-          </a:p>
-          <a:p>
-            <a:pPr marL="0" lvl="0" indent="0" eaLnBrk="0" fontAlgn="base" hangingPunct="0">
-              <a:lnSpc>
-                <a:spcPct val="100000"/>
-              </a:lnSpc>
-              <a:spcBef>
-                <a:spcPct val="0"/>
-              </a:spcBef>
-              <a:spcAft>
-                <a:spcPct val="0"/>
-              </a:spcAft>
-              <a:buFontTx/>
-              <a:buChar char="•"/>
+              <a:rPr lang="ja-JP" altLang="en-US" dirty="0"/>
+              <a:t>　↳闇鍋クイズ</a:t>
+            </a:r>
+            <a:endParaRPr lang="en-US" altLang="ja-JP" dirty="0"/>
+          </a:p>
+          <a:p>
+            <a:r>
+              <a:rPr lang="en-US" altLang="ja-JP" dirty="0">
+                <a:hlinkClick r:id="rId4"/>
+              </a:rPr>
+              <a:t>https://www.youtube.com/watch?v=aTDq6CB7nwA&amp;t=1s</a:t>
+            </a:r>
+            <a:endParaRPr lang="en-US" altLang="ja-JP" dirty="0"/>
+          </a:p>
+          <a:p>
+            <a:pPr marL="0" indent="0">
+              <a:buNone/>
             </a:pPr>
             <a:r>
-              <a:rPr lang="ja-JP" altLang="en-US" sz="3200" dirty="0"/>
-              <a:t>画面</a:t>
-            </a:r>
-            <a:r>
-              <a:rPr lang="en-US" altLang="ja-JP" sz="3200" dirty="0"/>
-              <a:t>2</a:t>
-            </a:r>
-            <a:r>
-              <a:rPr lang="ja-JP" altLang="en-US" sz="3200" dirty="0"/>
-              <a:t>：結果・解説画面 </a:t>
-            </a:r>
-            <a:r>
-              <a:rPr lang="en-US" altLang="ja-JP" sz="3200" dirty="0"/>
-              <a:t>(Result Page)</a:t>
-            </a:r>
-            <a:endParaRPr kumimoji="0" lang="ja-JP" altLang="ja-JP" sz="3200" b="0" i="0" u="none" strike="noStrike" cap="none" normalizeH="0" baseline="0" dirty="0">
-              <a:ln>
-                <a:noFill/>
-              </a:ln>
-              <a:solidFill>
-                <a:schemeClr val="tx1"/>
-              </a:solidFill>
-              <a:effectLst/>
-              <a:latin typeface="Arial" panose="020B0604020202020204" pitchFamily="34" charset="0"/>
-            </a:endParaRPr>
+              <a:rPr lang="ja-JP" altLang="en-US" dirty="0"/>
+              <a:t>　↳難易度マシマシクイズ</a:t>
+            </a:r>
+            <a:endParaRPr lang="en-US" altLang="ja-JP" dirty="0"/>
+          </a:p>
+          <a:p>
+            <a:r>
+              <a:rPr lang="en-US" altLang="ja-JP" dirty="0">
+                <a:hlinkClick r:id="rId5"/>
+              </a:rPr>
+              <a:t>https://www.youtube.com/watch?v=y1Nt_SslUT0</a:t>
+            </a:r>
+            <a:endParaRPr lang="en-US" altLang="ja-JP" dirty="0"/>
+          </a:p>
+          <a:p>
+            <a:pPr marL="0" indent="0">
+              <a:buNone/>
+            </a:pPr>
+            <a:r>
+              <a:rPr lang="ja-JP" altLang="en-US" dirty="0"/>
+              <a:t>　↳悪魔合体クイズ</a:t>
+            </a:r>
+            <a:endParaRPr lang="en-US" altLang="ja-JP" dirty="0"/>
+          </a:p>
+          <a:p>
+            <a:r>
+              <a:rPr lang="ja-JP" altLang="en-US" dirty="0"/>
+              <a:t>上記のような内容のクイズをプレイできるようにする</a:t>
+            </a:r>
+            <a:endParaRPr lang="en-US" altLang="ja-JP" dirty="0"/>
           </a:p>
         </p:txBody>
       </p:sp>
     </p:spTree>
     <p:extLst>
       <p:ext uri="{BB962C8B-B14F-4D97-AF65-F5344CB8AC3E}">
-        <p14:creationId xmlns:p14="http://schemas.microsoft.com/office/powerpoint/2010/main" val="2223361126"/>
+        <p14:creationId xmlns:p14="http://schemas.microsoft.com/office/powerpoint/2010/main" val="2173951986"/>
       </p:ext>
     </p:extLst>
   </p:cSld>

--- a/flutter_仕様書.pptx
+++ b/flutter_仕様書.pptx
@@ -8,6 +8,7 @@
     <p:sldId id="256" r:id="rId2"/>
     <p:sldId id="257" r:id="rId3"/>
     <p:sldId id="258" r:id="rId4"/>
+    <p:sldId id="259" r:id="rId5"/>
   </p:sldIdLst>
   <p:sldSz cx="12192000" cy="6858000"/>
   <p:notesSz cx="6858000" cy="9144000"/>
@@ -3964,6 +3965,135 @@
     <p:extLst>
       <p:ext uri="{BB962C8B-B14F-4D97-AF65-F5344CB8AC3E}">
         <p14:creationId xmlns:p14="http://schemas.microsoft.com/office/powerpoint/2010/main" val="2173951986"/>
+      </p:ext>
+    </p:extLst>
+  </p:cSld>
+  <p:clrMapOvr>
+    <a:masterClrMapping/>
+  </p:clrMapOvr>
+</p:sld>
+</file>
+
+<file path=ppt/slides/slide4.xml><?xml version="1.0" encoding="utf-8"?>
+<p:sld xmlns:a="http://schemas.openxmlformats.org/drawingml/2006/main" xmlns:r="http://schemas.openxmlformats.org/officeDocument/2006/relationships" xmlns:p="http://schemas.openxmlformats.org/presentationml/2006/main">
+  <p:cSld>
+    <p:spTree>
+      <p:nvGrpSpPr>
+        <p:cNvPr id="1" name=""/>
+        <p:cNvGrpSpPr/>
+        <p:nvPr/>
+      </p:nvGrpSpPr>
+      <p:grpSpPr>
+        <a:xfrm>
+          <a:off x="0" y="0"/>
+          <a:ext cx="0" cy="0"/>
+          <a:chOff x="0" y="0"/>
+          <a:chExt cx="0" cy="0"/>
+        </a:xfrm>
+      </p:grpSpPr>
+      <p:sp>
+        <p:nvSpPr>
+          <p:cNvPr id="2" name="タイトル 1">
+            <a:extLst>
+              <a:ext uri="{FF2B5EF4-FFF2-40B4-BE49-F238E27FC236}">
+                <a16:creationId xmlns:a16="http://schemas.microsoft.com/office/drawing/2014/main" id="{833B85DD-F814-F09B-9919-6F84AFF29FC8}"/>
+              </a:ext>
+            </a:extLst>
+          </p:cNvPr>
+          <p:cNvSpPr>
+            <a:spLocks noGrp="1"/>
+          </p:cNvSpPr>
+          <p:nvPr>
+            <p:ph type="title"/>
+          </p:nvPr>
+        </p:nvSpPr>
+        <p:spPr/>
+        <p:txBody>
+          <a:bodyPr/>
+          <a:lstStyle/>
+          <a:p>
+            <a:r>
+              <a:rPr lang="ja-JP" altLang="en-US" dirty="0"/>
+              <a:t>仕様が機能するか</a:t>
+            </a:r>
+            <a:endParaRPr kumimoji="1" lang="ja-JP" altLang="en-US" dirty="0"/>
+          </a:p>
+        </p:txBody>
+      </p:sp>
+      <p:sp>
+        <p:nvSpPr>
+          <p:cNvPr id="3" name="コンテンツ プレースホルダー 2">
+            <a:extLst>
+              <a:ext uri="{FF2B5EF4-FFF2-40B4-BE49-F238E27FC236}">
+                <a16:creationId xmlns:a16="http://schemas.microsoft.com/office/drawing/2014/main" id="{F57B8619-6E93-DED7-04C5-3FFFCF7D4C72}"/>
+              </a:ext>
+            </a:extLst>
+          </p:cNvPr>
+          <p:cNvSpPr>
+            <a:spLocks noGrp="1"/>
+          </p:cNvSpPr>
+          <p:nvPr>
+            <p:ph idx="1"/>
+          </p:nvPr>
+        </p:nvSpPr>
+        <p:spPr/>
+        <p:txBody>
+          <a:bodyPr/>
+          <a:lstStyle/>
+          <a:p>
+            <a:r>
+              <a:rPr lang="en-US" altLang="ja-JP" dirty="0">
+                <a:hlinkClick r:id="rId2"/>
+              </a:rPr>
+              <a:t>Flutter</a:t>
+            </a:r>
+            <a:r>
+              <a:rPr lang="ja-JP" altLang="en-US" dirty="0">
+                <a:hlinkClick r:id="rId2"/>
+              </a:rPr>
+              <a:t>でクイズアプリケーションを作成する方法 </a:t>
+            </a:r>
+            <a:r>
+              <a:rPr lang="en-US" altLang="ja-JP" dirty="0">
+                <a:hlinkClick r:id="rId2"/>
+              </a:rPr>
+              <a:t>#Flutter – </a:t>
+            </a:r>
+            <a:r>
+              <a:rPr lang="en-US" altLang="ja-JP" dirty="0" err="1">
+                <a:hlinkClick r:id="rId2"/>
+              </a:rPr>
+              <a:t>Qiita</a:t>
+            </a:r>
+            <a:endParaRPr lang="en-US" altLang="ja-JP" dirty="0"/>
+          </a:p>
+          <a:p>
+            <a:r>
+              <a:rPr lang="en-US" altLang="ja-JP" dirty="0">
+                <a:hlinkClick r:id="rId3"/>
+              </a:rPr>
+              <a:t>bing.com/ck/a?!&amp;&amp;p=89c0f957cce2491fb8d89f7dac2d1c4f014f6e58623f5e300991246332a9e51fJmltdHM9MTc3ODU0NDAwMA&amp;ptn=3&amp;ver=2&amp;hsh=4&amp;fclid=114d9b14-9966-6550-21ae-8d39981e64c1&amp;psq=flutter</a:t>
+            </a:r>
+            <a:r>
+              <a:rPr lang="ja-JP" altLang="en-US" dirty="0">
+                <a:hlinkClick r:id="rId3"/>
+              </a:rPr>
+              <a:t>でクイズアプリを作る</a:t>
+            </a:r>
+            <a:r>
+              <a:rPr lang="en-US" altLang="ja-JP" dirty="0">
+                <a:hlinkClick r:id="rId3"/>
+              </a:rPr>
+              <a:t>&amp;u=a1aHR0cHM6Ly96ZW5uLmRldi9tYXJvcG9vay9hcnRpY2xlcy80YmZhNTliNDY0NTIwYw&amp;ntb=1</a:t>
+            </a:r>
+            <a:endParaRPr kumimoji="1" lang="ja-JP" altLang="en-US" dirty="0"/>
+          </a:p>
+        </p:txBody>
+      </p:sp>
+    </p:spTree>
+    <p:extLst>
+      <p:ext uri="{BB962C8B-B14F-4D97-AF65-F5344CB8AC3E}">
+        <p14:creationId xmlns:p14="http://schemas.microsoft.com/office/powerpoint/2010/main" val="3338182206"/>
       </p:ext>
     </p:extLst>
   </p:cSld>

--- a/flutter_仕様書.pptx
+++ b/flutter_仕様書.pptx
@@ -9,6 +9,7 @@
     <p:sldId id="257" r:id="rId3"/>
     <p:sldId id="258" r:id="rId4"/>
     <p:sldId id="259" r:id="rId5"/>
+    <p:sldId id="260" r:id="rId6"/>
   </p:sldIdLst>
   <p:sldSz cx="12192000" cy="6858000"/>
   <p:notesSz cx="6858000" cy="9144000"/>
@@ -262,7 +263,7 @@
           <a:p>
             <a:fld id="{C36E91FD-3B1C-4228-B9F7-36E12070ADBD}" type="datetimeFigureOut">
               <a:rPr kumimoji="1" lang="ja-JP" altLang="en-US" smtClean="0"/>
-              <a:t>2026/5/13</a:t>
+              <a:t>2026/5/20</a:t>
             </a:fld>
             <a:endParaRPr kumimoji="1" lang="ja-JP" altLang="en-US"/>
           </a:p>
@@ -492,7 +493,7 @@
           <a:p>
             <a:fld id="{C36E91FD-3B1C-4228-B9F7-36E12070ADBD}" type="datetimeFigureOut">
               <a:rPr kumimoji="1" lang="ja-JP" altLang="en-US" smtClean="0"/>
-              <a:t>2026/5/13</a:t>
+              <a:t>2026/5/20</a:t>
             </a:fld>
             <a:endParaRPr kumimoji="1" lang="ja-JP" altLang="en-US"/>
           </a:p>
@@ -732,7 +733,7 @@
           <a:p>
             <a:fld id="{C36E91FD-3B1C-4228-B9F7-36E12070ADBD}" type="datetimeFigureOut">
               <a:rPr kumimoji="1" lang="ja-JP" altLang="en-US" smtClean="0"/>
-              <a:t>2026/5/13</a:t>
+              <a:t>2026/5/20</a:t>
             </a:fld>
             <a:endParaRPr kumimoji="1" lang="ja-JP" altLang="en-US"/>
           </a:p>
@@ -962,7 +963,7 @@
           <a:p>
             <a:fld id="{C36E91FD-3B1C-4228-B9F7-36E12070ADBD}" type="datetimeFigureOut">
               <a:rPr kumimoji="1" lang="ja-JP" altLang="en-US" smtClean="0"/>
-              <a:t>2026/5/13</a:t>
+              <a:t>2026/5/20</a:t>
             </a:fld>
             <a:endParaRPr kumimoji="1" lang="ja-JP" altLang="en-US"/>
           </a:p>
@@ -1237,7 +1238,7 @@
           <a:p>
             <a:fld id="{C36E91FD-3B1C-4228-B9F7-36E12070ADBD}" type="datetimeFigureOut">
               <a:rPr kumimoji="1" lang="ja-JP" altLang="en-US" smtClean="0"/>
-              <a:t>2026/5/13</a:t>
+              <a:t>2026/5/20</a:t>
             </a:fld>
             <a:endParaRPr kumimoji="1" lang="ja-JP" altLang="en-US"/>
           </a:p>
@@ -1566,7 +1567,7 @@
           <a:p>
             <a:fld id="{C36E91FD-3B1C-4228-B9F7-36E12070ADBD}" type="datetimeFigureOut">
               <a:rPr kumimoji="1" lang="ja-JP" altLang="en-US" smtClean="0"/>
-              <a:t>2026/5/13</a:t>
+              <a:t>2026/5/20</a:t>
             </a:fld>
             <a:endParaRPr kumimoji="1" lang="ja-JP" altLang="en-US"/>
           </a:p>
@@ -2042,7 +2043,7 @@
           <a:p>
             <a:fld id="{C36E91FD-3B1C-4228-B9F7-36E12070ADBD}" type="datetimeFigureOut">
               <a:rPr kumimoji="1" lang="ja-JP" altLang="en-US" smtClean="0"/>
-              <a:t>2026/5/13</a:t>
+              <a:t>2026/5/20</a:t>
             </a:fld>
             <a:endParaRPr kumimoji="1" lang="ja-JP" altLang="en-US"/>
           </a:p>
@@ -2183,7 +2184,7 @@
           <a:p>
             <a:fld id="{C36E91FD-3B1C-4228-B9F7-36E12070ADBD}" type="datetimeFigureOut">
               <a:rPr kumimoji="1" lang="ja-JP" altLang="en-US" smtClean="0"/>
-              <a:t>2026/5/13</a:t>
+              <a:t>2026/5/20</a:t>
             </a:fld>
             <a:endParaRPr kumimoji="1" lang="ja-JP" altLang="en-US"/>
           </a:p>
@@ -2296,7 +2297,7 @@
           <a:p>
             <a:fld id="{C36E91FD-3B1C-4228-B9F7-36E12070ADBD}" type="datetimeFigureOut">
               <a:rPr kumimoji="1" lang="ja-JP" altLang="en-US" smtClean="0"/>
-              <a:t>2026/5/13</a:t>
+              <a:t>2026/5/20</a:t>
             </a:fld>
             <a:endParaRPr kumimoji="1" lang="ja-JP" altLang="en-US"/>
           </a:p>
@@ -2639,7 +2640,7 @@
           <a:p>
             <a:fld id="{C36E91FD-3B1C-4228-B9F7-36E12070ADBD}" type="datetimeFigureOut">
               <a:rPr kumimoji="1" lang="ja-JP" altLang="en-US" smtClean="0"/>
-              <a:t>2026/5/13</a:t>
+              <a:t>2026/5/20</a:t>
             </a:fld>
             <a:endParaRPr kumimoji="1" lang="ja-JP" altLang="en-US"/>
           </a:p>
@@ -2927,7 +2928,7 @@
           <a:p>
             <a:fld id="{C36E91FD-3B1C-4228-B9F7-36E12070ADBD}" type="datetimeFigureOut">
               <a:rPr kumimoji="1" lang="ja-JP" altLang="en-US" smtClean="0"/>
-              <a:t>2026/5/13</a:t>
+              <a:t>2026/5/20</a:t>
             </a:fld>
             <a:endParaRPr kumimoji="1" lang="ja-JP" altLang="en-US"/>
           </a:p>
@@ -3200,7 +3201,7 @@
           <a:p>
             <a:fld id="{C36E91FD-3B1C-4228-B9F7-36E12070ADBD}" type="datetimeFigureOut">
               <a:rPr kumimoji="1" lang="ja-JP" altLang="en-US" smtClean="0"/>
-              <a:t>2026/5/13</a:t>
+              <a:t>2026/5/20</a:t>
             </a:fld>
             <a:endParaRPr kumimoji="1" lang="ja-JP" altLang="en-US"/>
           </a:p>
@@ -3859,7 +3860,7 @@
         </p:nvSpPr>
         <p:spPr>
           <a:xfrm>
-            <a:off x="838200" y="1825624"/>
+            <a:off x="947057" y="1825624"/>
             <a:ext cx="10515600" cy="4667251"/>
           </a:xfrm>
         </p:spPr>
@@ -4094,6 +4095,99 @@
     <p:extLst>
       <p:ext uri="{BB962C8B-B14F-4D97-AF65-F5344CB8AC3E}">
         <p14:creationId xmlns:p14="http://schemas.microsoft.com/office/powerpoint/2010/main" val="3338182206"/>
+      </p:ext>
+    </p:extLst>
+  </p:cSld>
+  <p:clrMapOvr>
+    <a:masterClrMapping/>
+  </p:clrMapOvr>
+</p:sld>
+</file>
+
+<file path=ppt/slides/slide5.xml><?xml version="1.0" encoding="utf-8"?>
+<p:sld xmlns:a="http://schemas.openxmlformats.org/drawingml/2006/main" xmlns:r="http://schemas.openxmlformats.org/officeDocument/2006/relationships" xmlns:p="http://schemas.openxmlformats.org/presentationml/2006/main">
+  <p:cSld>
+    <p:spTree>
+      <p:nvGrpSpPr>
+        <p:cNvPr id="1" name=""/>
+        <p:cNvGrpSpPr/>
+        <p:nvPr/>
+      </p:nvGrpSpPr>
+      <p:grpSpPr>
+        <a:xfrm>
+          <a:off x="0" y="0"/>
+          <a:ext cx="0" cy="0"/>
+          <a:chOff x="0" y="0"/>
+          <a:chExt cx="0" cy="0"/>
+        </a:xfrm>
+      </p:grpSpPr>
+      <p:sp>
+        <p:nvSpPr>
+          <p:cNvPr id="2" name="タイトル 1">
+            <a:extLst>
+              <a:ext uri="{FF2B5EF4-FFF2-40B4-BE49-F238E27FC236}">
+                <a16:creationId xmlns:a16="http://schemas.microsoft.com/office/drawing/2014/main" id="{EE256F38-0458-D8E1-7C26-1A1F79A54408}"/>
+              </a:ext>
+            </a:extLst>
+          </p:cNvPr>
+          <p:cNvSpPr>
+            <a:spLocks noGrp="1"/>
+          </p:cNvSpPr>
+          <p:nvPr>
+            <p:ph type="title"/>
+          </p:nvPr>
+        </p:nvSpPr>
+        <p:spPr/>
+        <p:txBody>
+          <a:bodyPr/>
+          <a:lstStyle/>
+          <a:p>
+            <a:r>
+              <a:rPr kumimoji="1" lang="en-US" altLang="ja-JP" dirty="0"/>
+              <a:t>Gemini API</a:t>
+            </a:r>
+            <a:r>
+              <a:rPr kumimoji="1" lang="ja-JP" altLang="en-US" dirty="0"/>
+              <a:t>の導入方法</a:t>
+            </a:r>
+          </a:p>
+        </p:txBody>
+      </p:sp>
+      <p:sp>
+        <p:nvSpPr>
+          <p:cNvPr id="3" name="コンテンツ プレースホルダー 2">
+            <a:extLst>
+              <a:ext uri="{FF2B5EF4-FFF2-40B4-BE49-F238E27FC236}">
+                <a16:creationId xmlns:a16="http://schemas.microsoft.com/office/drawing/2014/main" id="{D340A98E-576A-A6CA-25B7-E06E7CF30D1A}"/>
+              </a:ext>
+            </a:extLst>
+          </p:cNvPr>
+          <p:cNvSpPr>
+            <a:spLocks noGrp="1"/>
+          </p:cNvSpPr>
+          <p:nvPr>
+            <p:ph idx="1"/>
+          </p:nvPr>
+        </p:nvSpPr>
+        <p:spPr/>
+        <p:txBody>
+          <a:bodyPr/>
+          <a:lstStyle/>
+          <a:p>
+            <a:r>
+              <a:rPr lang="en-US" altLang="ja-JP" dirty="0">
+                <a:hlinkClick r:id="rId2"/>
+              </a:rPr>
+              <a:t>https://qiita.com/phibi-soon/items/e39ddc5138c3393111f8</a:t>
+            </a:r>
+            <a:endParaRPr lang="en-US" altLang="ja-JP" dirty="0"/>
+          </a:p>
+        </p:txBody>
+      </p:sp>
+    </p:spTree>
+    <p:extLst>
+      <p:ext uri="{BB962C8B-B14F-4D97-AF65-F5344CB8AC3E}">
+        <p14:creationId xmlns:p14="http://schemas.microsoft.com/office/powerpoint/2010/main" val="782118864"/>
       </p:ext>
     </p:extLst>
   </p:cSld>
